--- a/lotform/TPM_3_Lista_Modelos.pptx
+++ b/lotform/TPM_3_Lista_Modelos.pptx
@@ -2376,7 +2376,7 @@
                 <a:latin typeface="LG스마트체 Regular" panose="020B0600000101010101" pitchFamily="50" charset="-127"/>
                 <a:ea typeface="LG스마트체 Regular" panose="020B0600000101010101" pitchFamily="50" charset="-127"/>
               </a:rPr>
-              <a:t>Install PCB - model selection at changeover (Lot screen)</a:t>
+              <a:t>Line 2 · Install PCB - model selection at changeover (Lot screen)</a:t>
             </a:r>
           </a:p>
         </p:txBody>
@@ -9042,62 +9042,6 @@
       </p:sp>
       <p:sp>
         <p:nvSpPr>
-          <p:cNvPr id="417" name="Added box 417"/>
-          <p:cNvSpPr/>
-          <p:nvPr/>
-        </p:nvSpPr>
-        <p:spPr>
-          <a:xfrm>
-            <a:off x="7223760" y="5596128"/>
-            <a:ext cx="2523744" cy="512064"/>
-          </a:xfrm>
-          <a:prstGeom prst="roundRect">
-            <a:avLst>
-              <a:gd name="adj" fmla="val 12000"/>
-            </a:avLst>
-          </a:prstGeom>
-          <a:solidFill>
-            <a:srgbClr val="F2F2F2"/>
-          </a:solidFill>
-          <a:ln w="6350">
-            <a:solidFill>
-              <a:srgbClr val="BFBFBF"/>
-            </a:solidFill>
-          </a:ln>
-        </p:spPr>
-        <p:txBody>
-          <a:bodyPr wrap="square" lIns="36000" tIns="18000" rIns="36000" bIns="18000" anchor="ctr"/>
-          <a:lstStyle/>
-          <a:p>
-            <a:pPr algn="l"/>
-            <a:r>
-              <a:rPr lang="en-US" altLang="ko-KR" dirty="0" sz="800" b="1">
-                <a:solidFill>
-                  <a:srgbClr val="404040"/>
-                </a:solidFill>
-                <a:latin typeface="Arial"/>
-                <a:cs typeface="Arial"/>
-              </a:rPr>
-              <a:t>Line 1 with all updates</a:t>
-            </a:r>
-          </a:p>
-          <a:p>
-            <a:pPr algn="l"/>
-            <a:r>
-              <a:rPr lang="en-US" altLang="ko-KR" dirty="0" sz="700">
-                <a:solidFill>
-                  <a:srgbClr val="404040"/>
-                </a:solidFill>
-                <a:latin typeface="Arial"/>
-                <a:cs typeface="Arial"/>
-              </a:rPr>
-              <a:t>20,127 pcs on 2 Oct vs 16,678 on 12 Aug (+20.7%). 1 Oct: 17,449 pcs (controlled material), best hour 1,003.</a:t>
-            </a:r>
-          </a:p>
-        </p:txBody>
-      </p:sp>
-      <p:sp>
-        <p:nvSpPr>
           <p:cNvPr id="310" name="Source note"/>
           <p:cNvSpPr txBox="1"/>
           <p:nvPr/>
@@ -9125,7 +9069,7 @@
                   <a:srgbClr val="7F7F7F"/>
                 </a:solidFill>
               </a:rPr>
-              <a:t>Search times are approximate operator observations; effect on total changeover time still to be measured. Line data: hourly production report, TOP TLA Line 1.</a:t>
+              <a:t>Search times are approximate operator observations. Effect on total changeover time to be measured on Line 2 after formal release.</a:t>
             </a:r>
           </a:p>
         </p:txBody>

--- a/lotform/TPM_3_Lista_Modelos.pptx
+++ b/lotform/TPM_3_Lista_Modelos.pptx
@@ -197,7 +197,7 @@
           <a:p>
             <a:fld id="{CC56EB0B-3736-454C-BDC9-CFE6B03A8AAF}" type="datetimeFigureOut">
               <a:rPr lang="ko-KR" altLang="en-US" smtClean="0"/>
-              <a:t>2026-09-18</a:t>
+              <a:t>2026-10-05</a:t>
             </a:fld>
             <a:endParaRPr lang="ko-KR" altLang="en-US"/>
           </a:p>
@@ -2304,7 +2304,7 @@
               <a:defRPr/>
             </a:pPr>
             <a:r>
-              <a:rPr lang="en-US" altLang="ko-KR" sz="1800" b="1" spc="-30" dirty="0" smtClean="0">
+              <a:rPr lang="en-US" altLang="ko-KR" sz="1800" b="1" spc="-30" dirty="0">
                 <a:solidFill>
                   <a:prstClr val="black"/>
                 </a:solidFill>
@@ -2369,7 +2369,7 @@
               <a:defRPr/>
             </a:pPr>
             <a:r>
-              <a:rPr lang="en-US" altLang="ko-KR" sz="1600" dirty="0" smtClean="0">
+              <a:rPr lang="en-US" altLang="ko-KR" sz="1600" dirty="0">
                 <a:solidFill>
                   <a:schemeClr val="tx1"/>
                 </a:solidFill>
@@ -2783,7 +2783,7 @@
               <a:defRPr/>
             </a:pPr>
             <a:r>
-              <a:rPr kumimoji="1" lang="es-419" altLang="ko-KR" sz="1300" b="1" i="0" u="none" strike="noStrike" kern="1200" cap="none" spc="-50" normalizeH="0" baseline="0" noProof="0" dirty="0" smtClean="0">
+              <a:rPr kumimoji="1" lang="es-419" altLang="ko-KR" sz="1300" b="1" i="0" u="none" strike="noStrike" kern="1200" cap="none" spc="-50" normalizeH="0" baseline="0" noProof="0" dirty="0">
                 <a:ln>
                   <a:noFill/>
                 </a:ln>
@@ -3134,17 +3134,17 @@
               <a:buNone/>
             </a:pPr>
             <a:r>
-              <a:rPr lang="en-US" altLang="ko-KR" dirty="0" sz="1400" b="1"/>
+              <a:rPr lang="en-US" altLang="ko-KR" sz="1400" b="1" dirty="0"/>
               <a:t>EFFECT:</a:t>
             </a:r>
           </a:p>
           <a:p>
-            <a:pPr algn="l" marL="171450" indent="-171450">
+            <a:pPr marL="171450" indent="-171450" algn="l">
               <a:buFont typeface="Arial"/>
               <a:buChar char="•"/>
             </a:pPr>
             <a:r>
-              <a:rPr lang="en-US" altLang="ko-KR" dirty="0" sz="1000"/>
+              <a:rPr lang="en-US" altLang="ko-KR" sz="1000" dirty="0"/>
               <a:t>Finding the model at changeover now takes one tap plus a short list.</a:t>
             </a:r>
           </a:p>
@@ -4028,7 +4028,7 @@
         </p:nvGraphicFramePr>
         <p:xfrm>
           <a:off x="8807451" y="560208"/>
-          <a:ext cx="1012827" cy="950688"/>
+          <a:ext cx="1012827" cy="874488"/>
         </p:xfrm>
         <a:graphic>
           <a:graphicData uri="http://schemas.openxmlformats.org/drawingml/2006/table">
@@ -7442,7 +7442,7 @@
               <a:t> </a:t>
             </a:r>
             <a:r>
-              <a:rPr kumimoji="1" lang="es-419" altLang="ko-KR" sz="1300" b="1" i="0" u="none" strike="noStrike" kern="1200" cap="none" spc="0" normalizeH="0" baseline="0" noProof="0" dirty="0" smtClean="0">
+              <a:rPr kumimoji="1" lang="es-419" altLang="ko-KR" sz="1300" b="1" i="0" u="none" strike="noStrike" kern="1200" cap="none" spc="0" normalizeH="0" baseline="0" noProof="0" dirty="0">
                 <a:ln>
                   <a:noFill/>
                 </a:ln>
@@ -7704,7 +7704,7 @@
               <a:buNone/>
             </a:pPr>
             <a:r>
-              <a:rPr lang="en-US" altLang="ko-KR" dirty="0" sz="1000"/>
+              <a:rPr lang="en-US" altLang="ko-KR" sz="1000" dirty="0"/>
               <a:t>Model filter buttons added above the module list. Each button is a model number (1-15) and shows the variants it has (L, R, X). One tap shows only that model; TODOS shows the full list.</a:t>
             </a:r>
           </a:p>
@@ -7875,7 +7875,7 @@
               <a:buNone/>
             </a:pPr>
             <a:r>
-              <a:rPr lang="en-US" altLang="ko-KR" dirty="0" sz="1000"/>
+              <a:rPr lang="en-US" altLang="ko-KR" sz="1000" dirty="0"/>
               <a:t>No grouping by model: variants of the same model (L, R, X and revisions MM00, MM10, MM20...) were scattered across the list.</a:t>
             </a:r>
           </a:p>
@@ -7884,7 +7884,7 @@
               <a:buNone/>
             </a:pPr>
             <a:r>
-              <a:rPr lang="en-US" altLang="ko-KR" dirty="0" sz="1000"/>
+              <a:rPr lang="en-US" altLang="ko-KR" sz="1000" dirty="0"/>
               <a:t>The search was slow and it was easy to pick a similar name by mistake, on a step that is on the critical path of the changeover.</a:t>
             </a:r>
           </a:p>
@@ -7944,14 +7944,14 @@
               <a:t>18</a:t>
             </a:r>
             <a:r>
-              <a:rPr lang="en-US" altLang="ko-KR" sz="1000" b="1" spc="-29" dirty="0" smtClean="0">
+              <a:rPr lang="en-US" altLang="ko-KR" sz="1000" b="1" spc="-29" dirty="0">
                 <a:latin typeface="Arial Narrow" panose="020B0606020202030204" pitchFamily="34" charset="0"/>
                 <a:ea typeface="LG스마트체 Regular" panose="020B0600000101010101" pitchFamily="50" charset="-127"/>
               </a:rPr>
               <a:t>/09/2026</a:t>
             </a:r>
             <a:r>
-              <a:rPr lang="ko-KR" altLang="en-US" sz="1000" b="1" spc="-29" dirty="0" smtClean="0">
+              <a:rPr lang="ko-KR" altLang="en-US" sz="1000" b="1" spc="-29" dirty="0">
                 <a:latin typeface="Arial Narrow" panose="020B0606020202030204" pitchFamily="34" charset="0"/>
                 <a:ea typeface="LG스마트체 Regular" panose="020B0600000101010101" pitchFamily="50" charset="-127"/>
               </a:rPr>
@@ -8192,12 +8192,12 @@
               <a:buNone/>
             </a:pPr>
             <a:r>
-              <a:rPr lang="en-US" altLang="ko-KR" dirty="0" sz="1400" b="1"/>
+              <a:rPr lang="en-US" altLang="ko-KR" sz="1400" b="1" dirty="0"/>
               <a:t>IMPACT:</a:t>
             </a:r>
           </a:p>
           <a:p>
-            <a:pPr algn="l" marL="171450" indent="-171450">
+            <a:pPr marL="171450" indent="-171450" algn="l">
               <a:spcAft>
                 <a:spcPts val="300"/>
               </a:spcAft>
@@ -8205,12 +8205,12 @@
               <a:buChar char="•"/>
             </a:pPr>
             <a:r>
-              <a:rPr lang="en-US" altLang="ko-KR" dirty="0" sz="900"/>
+              <a:rPr lang="en-US" altLang="ko-KR" sz="900" dirty="0"/>
               <a:t>About 35 s saved per changeover in the model search.</a:t>
             </a:r>
           </a:p>
           <a:p>
-            <a:pPr algn="l" marL="171450" indent="-171450">
+            <a:pPr marL="171450" indent="-171450" algn="l">
               <a:spcAft>
                 <a:spcPts val="300"/>
               </a:spcAft>
@@ -8218,12 +8218,12 @@
               <a:buChar char="•"/>
             </a:pPr>
             <a:r>
-              <a:rPr lang="en-US" altLang="ko-KR" dirty="0" sz="900"/>
+              <a:rPr lang="en-US" altLang="ko-KR" sz="900" dirty="0"/>
               <a:t>Lower risk of picking the wrong model: only its variants are shown.</a:t>
             </a:r>
           </a:p>
           <a:p>
-            <a:pPr algn="l" marL="171450" indent="-171450">
+            <a:pPr marL="171450" indent="-171450" algn="l">
               <a:spcAft>
                 <a:spcPts val="300"/>
               </a:spcAft>
@@ -8231,7 +8231,7 @@
               <a:buChar char="•"/>
             </a:pPr>
             <a:r>
-              <a:rPr lang="en-US" altLang="ko-KR" dirty="0" sz="900"/>
+              <a:rPr lang="en-US" altLang="ko-KR" sz="900" dirty="0"/>
               <a:t>Applicable to other stations with the same Lot screen.</a:t>
             </a:r>
           </a:p>
@@ -8296,7 +8296,7 @@
           <a:p>
             <a:pPr algn="l"/>
             <a:r>
-              <a:rPr lang="en-US" altLang="ko-KR" dirty="0" sz="750" b="1">
+              <a:rPr lang="en-US" altLang="ko-KR" sz="750" b="1" dirty="0">
                 <a:solidFill>
                   <a:srgbClr val="A50034"/>
                 </a:solidFill>
@@ -8317,7 +8317,7 @@
           <p:nvPr/>
         </p:nvPicPr>
         <p:blipFill>
-          <a:blip r:embed="rIdImg0"/>
+          <a:blip r:embed="rId3"/>
           <a:stretch>
             <a:fillRect/>
           </a:stretch>
@@ -8364,7 +8364,7 @@
           <a:p>
             <a:pPr algn="l"/>
             <a:r>
-              <a:rPr lang="en-US" altLang="ko-KR" dirty="0" sz="750" b="1">
+              <a:rPr lang="en-US" altLang="ko-KR" sz="750" b="1" dirty="0">
                 <a:solidFill>
                   <a:srgbClr val="00703C"/>
                 </a:solidFill>
@@ -8385,7 +8385,7 @@
           <p:nvPr/>
         </p:nvPicPr>
         <p:blipFill>
-          <a:blip r:embed="rIdImg1"/>
+          <a:blip r:embed="rId4"/>
           <a:stretch>
             <a:fillRect/>
           </a:stretch>
@@ -8432,7 +8432,7 @@
           <a:p>
             <a:pPr algn="l"/>
             <a:r>
-              <a:rPr lang="en-US" altLang="ko-KR" dirty="0" sz="750" b="1">
+              <a:rPr lang="en-US" altLang="ko-KR" sz="750" b="1" dirty="0">
                 <a:solidFill>
                   <a:srgbClr val="595959"/>
                 </a:solidFill>
@@ -8473,7 +8473,7 @@
           <a:p>
             <a:pPr algn="ctr"/>
             <a:r>
-              <a:rPr lang="en-US" altLang="ko-KR" dirty="0" sz="1000" b="1">
+              <a:rPr lang="en-US" altLang="ko-KR" sz="1000" b="1" dirty="0">
                 <a:solidFill>
                   <a:srgbClr val="404040"/>
                 </a:solidFill>
@@ -8512,7 +8512,7 @@
           <a:p>
             <a:pPr algn="ctr"/>
             <a:r>
-              <a:rPr lang="en-US" altLang="ko-KR" dirty="0" sz="650">
+              <a:rPr lang="en-US" altLang="ko-KR" sz="650" dirty="0">
                 <a:solidFill>
                   <a:srgbClr val="595959"/>
                 </a:solidFill>
@@ -8551,7 +8551,7 @@
           <a:p>
             <a:pPr algn="ctr"/>
             <a:r>
-              <a:rPr lang="en-US" altLang="ko-KR" dirty="0" sz="1000" b="1">
+              <a:rPr lang="en-US" altLang="ko-KR" sz="1000" b="1" dirty="0">
                 <a:solidFill>
                   <a:srgbClr val="FFFFFF"/>
                 </a:solidFill>
@@ -8590,7 +8590,7 @@
           <a:p>
             <a:pPr algn="ctr"/>
             <a:r>
-              <a:rPr lang="en-US" altLang="ko-KR" dirty="0" sz="650">
+              <a:rPr lang="en-US" altLang="ko-KR" sz="650" dirty="0">
                 <a:solidFill>
                   <a:srgbClr val="595959"/>
                 </a:solidFill>
@@ -8629,7 +8629,7 @@
           <a:p>
             <a:pPr algn="ctr"/>
             <a:r>
-              <a:rPr lang="en-US" altLang="ko-KR" dirty="0" sz="1000" b="1">
+              <a:rPr lang="en-US" altLang="ko-KR" sz="1000" b="1" dirty="0">
                 <a:solidFill>
                   <a:srgbClr val="FFFFFF"/>
                 </a:solidFill>
@@ -8668,7 +8668,7 @@
           <a:p>
             <a:pPr algn="ctr"/>
             <a:r>
-              <a:rPr lang="en-US" altLang="ko-KR" dirty="0" sz="650">
+              <a:rPr lang="en-US" altLang="ko-KR" sz="650" dirty="0">
                 <a:solidFill>
                   <a:srgbClr val="595959"/>
                 </a:solidFill>
@@ -8709,7 +8709,7 @@
           <a:p>
             <a:pPr algn="ctr"/>
             <a:r>
-              <a:rPr lang="en-US" altLang="ko-KR" dirty="0" sz="1000" b="1">
+              <a:rPr lang="en-US" altLang="ko-KR" sz="1000" b="1" dirty="0">
                 <a:solidFill>
                   <a:srgbClr val="404040"/>
                 </a:solidFill>
@@ -8748,7 +8748,7 @@
           <a:p>
             <a:pPr algn="ctr"/>
             <a:r>
-              <a:rPr lang="en-US" altLang="ko-KR" dirty="0" sz="650">
+              <a:rPr lang="en-US" altLang="ko-KR" sz="650" dirty="0">
                 <a:solidFill>
                   <a:srgbClr val="595959"/>
                 </a:solidFill>
@@ -8791,7 +8791,7 @@
           <a:p>
             <a:pPr algn="ctr"/>
             <a:r>
-              <a:rPr lang="en-US" altLang="ko-KR" dirty="0" sz="1300" b="1">
+              <a:rPr lang="en-US" altLang="ko-KR" sz="1300" b="1" dirty="0">
                 <a:solidFill>
                   <a:srgbClr val="A50034"/>
                 </a:solidFill>
@@ -8804,7 +8804,7 @@
           <a:p>
             <a:pPr algn="ctr"/>
             <a:r>
-              <a:rPr lang="en-US" altLang="ko-KR" dirty="0" sz="700">
+              <a:rPr lang="en-US" altLang="ko-KR" sz="700" dirty="0">
                 <a:solidFill>
                   <a:srgbClr val="404040"/>
                 </a:solidFill>
@@ -8847,7 +8847,7 @@
           <a:p>
             <a:pPr algn="ctr"/>
             <a:r>
-              <a:rPr lang="en-US" altLang="ko-KR" dirty="0" sz="1300" b="1">
+              <a:rPr lang="en-US" altLang="ko-KR" sz="1300" b="1" dirty="0">
                 <a:solidFill>
                   <a:srgbClr val="00703C"/>
                 </a:solidFill>
@@ -8860,7 +8860,7 @@
           <a:p>
             <a:pPr algn="ctr"/>
             <a:r>
-              <a:rPr lang="en-US" altLang="ko-KR" dirty="0" sz="700">
+              <a:rPr lang="en-US" altLang="ko-KR" sz="700" dirty="0">
                 <a:solidFill>
                   <a:srgbClr val="404040"/>
                 </a:solidFill>
@@ -8903,7 +8903,7 @@
           <a:p>
             <a:pPr algn="ctr"/>
             <a:r>
-              <a:rPr lang="en-US" altLang="ko-KR" dirty="0" sz="1300" b="1">
+              <a:rPr lang="en-US" altLang="ko-KR" sz="1300" b="1" dirty="0">
                 <a:solidFill>
                   <a:srgbClr val="00703C"/>
                 </a:solidFill>
@@ -8916,7 +8916,7 @@
           <a:p>
             <a:pPr algn="ctr"/>
             <a:r>
-              <a:rPr lang="en-US" altLang="ko-KR" dirty="0" sz="700">
+              <a:rPr lang="en-US" altLang="ko-KR" sz="700" dirty="0">
                 <a:solidFill>
                   <a:srgbClr val="404040"/>
                 </a:solidFill>
@@ -8959,7 +8959,7 @@
           <a:p>
             <a:pPr algn="ctr"/>
             <a:r>
-              <a:rPr lang="en-US" altLang="ko-KR" dirty="0" sz="1200" b="1">
+              <a:rPr lang="en-US" altLang="ko-KR" sz="1200" b="1" dirty="0">
                 <a:solidFill>
                   <a:srgbClr val="A50034"/>
                 </a:solidFill>
@@ -8972,7 +8972,7 @@
           <a:p>
             <a:pPr algn="ctr"/>
             <a:r>
-              <a:rPr lang="en-US" altLang="ko-KR" dirty="0" sz="700">
+              <a:rPr lang="en-US" altLang="ko-KR" sz="700" dirty="0">
                 <a:solidFill>
                   <a:srgbClr val="404040"/>
                 </a:solidFill>
@@ -9015,7 +9015,7 @@
           <a:p>
             <a:pPr algn="ctr"/>
             <a:r>
-              <a:rPr lang="en-US" altLang="ko-KR" dirty="0" sz="1200" b="1">
+              <a:rPr lang="en-US" altLang="ko-KR" sz="1200" b="1" dirty="0">
                 <a:solidFill>
                   <a:srgbClr val="00703C"/>
                 </a:solidFill>
@@ -9028,7 +9028,7 @@
           <a:p>
             <a:pPr algn="ctr"/>
             <a:r>
-              <a:rPr lang="en-US" altLang="ko-KR" dirty="0" sz="700">
+              <a:rPr lang="en-US" altLang="ko-KR" sz="700" dirty="0">
                 <a:solidFill>
                   <a:srgbClr val="404040"/>
                 </a:solidFill>
@@ -9071,20 +9071,20 @@
           <a:p>
             <a:pPr algn="l"/>
             <a:r>
-              <a:rPr lang="en-US" altLang="ko-KR" dirty="0" sz="800" b="1">
+              <a:rPr lang="en-US" altLang="ko-KR" sz="800" b="1" dirty="0">
                 <a:solidFill>
                   <a:srgbClr val="404040"/>
                 </a:solidFill>
                 <a:latin typeface="Arial"/>
                 <a:cs typeface="Arial"/>
               </a:rPr>
-              <a:t>Line 1 with all updates</a:t>
+              <a:t>Line 2 with all updates</a:t>
             </a:r>
           </a:p>
           <a:p>
             <a:pPr algn="l"/>
             <a:r>
-              <a:rPr lang="en-US" altLang="ko-KR" dirty="0" sz="700">
+              <a:rPr lang="en-US" altLang="ko-KR" sz="700" dirty="0">
                 <a:solidFill>
                   <a:srgbClr val="404040"/>
                 </a:solidFill>
@@ -9120,7 +9120,7 @@
               <a:buNone/>
             </a:pPr>
             <a:r>
-              <a:rPr lang="en-US" altLang="ko-KR" dirty="0" sz="650">
+              <a:rPr lang="en-US" altLang="ko-KR" sz="650" dirty="0">
                 <a:solidFill>
                   <a:srgbClr val="7F7F7F"/>
                 </a:solidFill>
@@ -9721,4 +9721,10 @@
     </a:ext>
   </a:extLst>
 </a:theme>
+</file>
+
+<file path=docMetadata/LabelInfo.xml><?xml version="1.0" encoding="utf-8"?>
+<clbl:labelList xmlns:clbl="http://schemas.microsoft.com/office/2020/mipLabelMetadata">
+  <clbl:label id="{99b8a968-831d-4cfc-b1f9-4367a1331151}" enabled="1" method="Privileged" siteId="{e6c7989d-a5fe-4b7b-a335-3288406db2fd}" contentBits="3" removed="0"/>
+</clbl:labelList>
 </file>